--- a/examples/ppt/shapes/shapes-connectors.pptx
+++ b/examples/ppt/shapes/shapes-connectors.pptx
@@ -5,9 +5,10 @@
     <p:sldMasterId xmlns:r="http://schemas.openxmlformats.org/officeDocument/2006/relationships" id="2147483648" r:id="rId1"/>
   </p:sldMasterIdLst>
   <p:sldIdLst>
-    <p:sldId id="256" r:id="Rd3501a43d7024b12"/>
-    <p:sldId id="257" r:id="R2df96527f70d487c"/>
-    <p:sldId id="258" r:id="Rf4ae566e07b44e05"/>
+    <p:sldId id="256" r:id="R8d1328cca1684ee3"/>
+    <p:sldId id="257" r:id="R34e5d534818c4fae"/>
+    <p:sldId id="258" r:id="Rbe90c0d482dc4cbd"/>
+    <p:sldId id="259" r:id="Rb197c6c3088d411f"/>
   </p:sldIdLst>
   <p:sldSz cx="12192000" cy="6858000"/>
   <p:notesSz cx="6858000" cy="9144000"/>
@@ -316,8 +317,8 @@
       <p:grpSpPr/>
       <p:sp>
         <p:nvSpPr>
-          <p:cNvPr id="10000" name="TextBox 1"/>
-          <p:cNvSpPr/>
+          <p:cNvPr id="100000" name="TextBox 1"/>
+          <p:cNvSpPr txBox="1"/>
           <p:nvPr/>
         </p:nvSpPr>
         <p:spPr>
@@ -342,7 +343,7 @@
       </p:sp>
       <p:sp>
         <p:nvSpPr>
-          <p:cNvPr id="10001" name="TextBox 2"/>
+          <p:cNvPr id="100001" name="TextBox 2"/>
           <p:cNvSpPr/>
           <p:nvPr/>
         </p:nvSpPr>
@@ -375,7 +376,7 @@
       </p:sp>
       <p:sp>
         <p:nvSpPr>
-          <p:cNvPr id="10002" name="TextBox 3"/>
+          <p:cNvPr id="100002" name="TextBox 3"/>
           <p:cNvSpPr/>
           <p:nvPr/>
         </p:nvSpPr>
@@ -408,10 +409,10 @@
       </p:sp>
       <p:cxnSp>
         <p:nvCxnSpPr>
-          <p:cNvPr id="10003" name="Connector 1"/>
+          <p:cNvPr id="100003" name="Connector 1"/>
           <p:cNvCxnSpPr>
-            <a:stCxn xmlns:a="http://schemas.openxmlformats.org/drawingml/2006/main" id="10001" idx="0"/>
-            <a:endCxn xmlns:a="http://schemas.openxmlformats.org/drawingml/2006/main" id="10002" idx="0"/>
+            <a:stCxn xmlns:a="http://schemas.openxmlformats.org/drawingml/2006/main" id="100001" idx="0"/>
+            <a:endCxn xmlns:a="http://schemas.openxmlformats.org/drawingml/2006/main" id="100002" idx="0"/>
           </p:cNvCxnSpPr>
           <p:nvPr/>
         </p:nvCxnSpPr>
@@ -433,8 +434,8 @@
       </p:cxnSp>
       <p:sp>
         <p:nvSpPr>
-          <p:cNvPr id="10004" name="TextBox 4"/>
-          <p:cNvSpPr/>
+          <p:cNvPr id="100004" name="TextBox 4"/>
+          <p:cNvSpPr txBox="1"/>
           <p:nvPr/>
         </p:nvSpPr>
         <p:spPr>
@@ -459,7 +460,7 @@
       </p:sp>
       <p:sp>
         <p:nvSpPr>
-          <p:cNvPr id="10005" name="TextBox 5"/>
+          <p:cNvPr id="100005" name="TextBox 5"/>
           <p:cNvSpPr/>
           <p:nvPr/>
         </p:nvSpPr>
@@ -492,7 +493,7 @@
       </p:sp>
       <p:sp>
         <p:nvSpPr>
-          <p:cNvPr id="10006" name="TextBox 6"/>
+          <p:cNvPr id="100006" name="TextBox 6"/>
           <p:cNvSpPr/>
           <p:nvPr/>
         </p:nvSpPr>
@@ -525,10 +526,10 @@
       </p:sp>
       <p:cxnSp>
         <p:nvCxnSpPr>
-          <p:cNvPr id="10007" name="Connector 2"/>
+          <p:cNvPr id="100007" name="Connector 2"/>
           <p:cNvCxnSpPr>
-            <a:stCxn xmlns:a="http://schemas.openxmlformats.org/drawingml/2006/main" id="10005" idx="0"/>
-            <a:endCxn xmlns:a="http://schemas.openxmlformats.org/drawingml/2006/main" id="10006" idx="0"/>
+            <a:stCxn xmlns:a="http://schemas.openxmlformats.org/drawingml/2006/main" id="100005" idx="0"/>
+            <a:endCxn xmlns:a="http://schemas.openxmlformats.org/drawingml/2006/main" id="100006" idx="0"/>
           </p:cNvCxnSpPr>
           <p:nvPr/>
         </p:nvCxnSpPr>
@@ -550,8 +551,8 @@
       </p:cxnSp>
       <p:sp>
         <p:nvSpPr>
-          <p:cNvPr id="10008" name="TextBox 7"/>
-          <p:cNvSpPr/>
+          <p:cNvPr id="100008" name="TextBox 7"/>
+          <p:cNvSpPr txBox="1"/>
           <p:nvPr/>
         </p:nvSpPr>
         <p:spPr>
@@ -576,7 +577,7 @@
       </p:sp>
       <p:sp>
         <p:nvSpPr>
-          <p:cNvPr id="10009" name="TextBox 8"/>
+          <p:cNvPr id="100009" name="TextBox 8"/>
           <p:cNvSpPr/>
           <p:nvPr/>
         </p:nvSpPr>
@@ -609,7 +610,7 @@
       </p:sp>
       <p:sp>
         <p:nvSpPr>
-          <p:cNvPr id="10010" name="TextBox 9"/>
+          <p:cNvPr id="100010" name="TextBox 9"/>
           <p:cNvSpPr/>
           <p:nvPr/>
         </p:nvSpPr>
@@ -642,10 +643,10 @@
       </p:sp>
       <p:cxnSp>
         <p:nvCxnSpPr>
-          <p:cNvPr id="10011" name="Connector 3"/>
+          <p:cNvPr id="100011" name="Connector 3"/>
           <p:cNvCxnSpPr>
-            <a:stCxn xmlns:a="http://schemas.openxmlformats.org/drawingml/2006/main" id="10009" idx="0"/>
-            <a:endCxn xmlns:a="http://schemas.openxmlformats.org/drawingml/2006/main" id="10010" idx="0"/>
+            <a:stCxn xmlns:a="http://schemas.openxmlformats.org/drawingml/2006/main" id="100009" idx="0"/>
+            <a:endCxn xmlns:a="http://schemas.openxmlformats.org/drawingml/2006/main" id="100010" idx="0"/>
           </p:cNvCxnSpPr>
           <p:nvPr/>
         </p:nvCxnSpPr>
@@ -667,8 +668,8 @@
       </p:cxnSp>
       <p:sp>
         <p:nvSpPr>
-          <p:cNvPr id="10012" name="TextBox 10"/>
-          <p:cNvSpPr/>
+          <p:cNvPr id="100012" name="TextBox 10"/>
+          <p:cNvSpPr txBox="1"/>
           <p:nvPr/>
         </p:nvSpPr>
         <p:spPr>
@@ -708,8 +709,8 @@
       <p:grpSpPr/>
       <p:sp>
         <p:nvSpPr>
-          <p:cNvPr id="10013" name="TextBox 1"/>
-          <p:cNvSpPr/>
+          <p:cNvPr id="100013" name="TextBox 1"/>
+          <p:cNvSpPr txBox="1"/>
           <p:nvPr/>
         </p:nvSpPr>
         <p:spPr>
@@ -734,7 +735,7 @@
       </p:sp>
       <p:sp>
         <p:nvSpPr>
-          <p:cNvPr id="10014" name="TextBox 2"/>
+          <p:cNvPr id="100014" name="TextBox 2"/>
           <p:cNvSpPr/>
           <p:nvPr/>
         </p:nvSpPr>
@@ -767,7 +768,7 @@
       </p:sp>
       <p:sp>
         <p:nvSpPr>
-          <p:cNvPr id="10015" name="TextBox 3"/>
+          <p:cNvPr id="100015" name="TextBox 3"/>
           <p:cNvSpPr/>
           <p:nvPr/>
         </p:nvSpPr>
@@ -800,7 +801,7 @@
       </p:sp>
       <p:sp>
         <p:nvSpPr>
-          <p:cNvPr id="10016" name="TextBox 4"/>
+          <p:cNvPr id="100016" name="TextBox 4"/>
           <p:cNvSpPr/>
           <p:nvPr/>
         </p:nvSpPr>
@@ -833,7 +834,7 @@
       </p:sp>
       <p:sp>
         <p:nvSpPr>
-          <p:cNvPr id="10017" name="TextBox 5"/>
+          <p:cNvPr id="100017" name="TextBox 5"/>
           <p:cNvSpPr/>
           <p:nvPr/>
         </p:nvSpPr>
@@ -866,10 +867,10 @@
       </p:sp>
       <p:cxnSp>
         <p:nvCxnSpPr>
-          <p:cNvPr id="10018" name="Connector 1"/>
+          <p:cNvPr id="100018" name="Connector 1"/>
           <p:cNvCxnSpPr>
-            <a:stCxn xmlns:a="http://schemas.openxmlformats.org/drawingml/2006/main" id="10014" idx="0"/>
-            <a:endCxn xmlns:a="http://schemas.openxmlformats.org/drawingml/2006/main" id="10015" idx="0"/>
+            <a:stCxn xmlns:a="http://schemas.openxmlformats.org/drawingml/2006/main" id="100014" idx="0"/>
+            <a:endCxn xmlns:a="http://schemas.openxmlformats.org/drawingml/2006/main" id="100015" idx="0"/>
           </p:cNvCxnSpPr>
           <p:nvPr/>
         </p:nvCxnSpPr>
@@ -891,10 +892,10 @@
       </p:cxnSp>
       <p:cxnSp>
         <p:nvCxnSpPr>
-          <p:cNvPr id="10019" name="Connector 2"/>
+          <p:cNvPr id="100019" name="Connector 2"/>
           <p:cNvCxnSpPr>
-            <a:stCxn xmlns:a="http://schemas.openxmlformats.org/drawingml/2006/main" id="10015" idx="0"/>
-            <a:endCxn xmlns:a="http://schemas.openxmlformats.org/drawingml/2006/main" id="10016" idx="0"/>
+            <a:stCxn xmlns:a="http://schemas.openxmlformats.org/drawingml/2006/main" id="100015" idx="0"/>
+            <a:endCxn xmlns:a="http://schemas.openxmlformats.org/drawingml/2006/main" id="100016" idx="0"/>
           </p:cNvCxnSpPr>
           <p:nvPr/>
         </p:nvCxnSpPr>
@@ -916,10 +917,10 @@
       </p:cxnSp>
       <p:cxnSp>
         <p:nvCxnSpPr>
-          <p:cNvPr id="10020" name="Connector 3"/>
+          <p:cNvPr id="100020" name="Connector 3"/>
           <p:cNvCxnSpPr>
-            <a:stCxn xmlns:a="http://schemas.openxmlformats.org/drawingml/2006/main" id="10015" idx="0"/>
-            <a:endCxn xmlns:a="http://schemas.openxmlformats.org/drawingml/2006/main" id="10017" idx="0"/>
+            <a:stCxn xmlns:a="http://schemas.openxmlformats.org/drawingml/2006/main" id="100015" idx="0"/>
+            <a:endCxn xmlns:a="http://schemas.openxmlformats.org/drawingml/2006/main" id="100017" idx="0"/>
           </p:cNvCxnSpPr>
           <p:nvPr/>
         </p:nvCxnSpPr>
@@ -942,10 +943,10 @@
       </p:cxnSp>
       <p:cxnSp>
         <p:nvCxnSpPr>
-          <p:cNvPr id="10021" name="Connector 4"/>
+          <p:cNvPr id="100021" name="Connector 4"/>
           <p:cNvCxnSpPr>
-            <a:stCxn xmlns:a="http://schemas.openxmlformats.org/drawingml/2006/main" id="10017" idx="0"/>
-            <a:endCxn xmlns:a="http://schemas.openxmlformats.org/drawingml/2006/main" id="10014" idx="0"/>
+            <a:stCxn xmlns:a="http://schemas.openxmlformats.org/drawingml/2006/main" id="100017" idx="0"/>
+            <a:endCxn xmlns:a="http://schemas.openxmlformats.org/drawingml/2006/main" id="100014" idx="0"/>
           </p:cNvCxnSpPr>
           <p:nvPr/>
         </p:nvCxnSpPr>
@@ -968,8 +969,8 @@
       </p:cxnSp>
       <p:sp>
         <p:nvSpPr>
-          <p:cNvPr id="10022" name="TextBox 6"/>
-          <p:cNvSpPr/>
+          <p:cNvPr id="100022" name="TextBox 6"/>
+          <p:cNvSpPr txBox="1"/>
           <p:nvPr/>
         </p:nvSpPr>
         <p:spPr>
@@ -998,8 +999,8 @@
       </p:sp>
       <p:sp>
         <p:nvSpPr>
-          <p:cNvPr id="10023" name="TextBox 7"/>
-          <p:cNvSpPr/>
+          <p:cNvPr id="100023" name="TextBox 7"/>
+          <p:cNvSpPr txBox="1"/>
           <p:nvPr/>
         </p:nvSpPr>
         <p:spPr>
@@ -1043,8 +1044,8 @@
       <p:grpSpPr/>
       <p:sp>
         <p:nvSpPr>
-          <p:cNvPr id="10024" name="TextBox 1"/>
-          <p:cNvSpPr/>
+          <p:cNvPr id="100024" name="TextBox 1"/>
+          <p:cNvSpPr txBox="1"/>
           <p:nvPr/>
         </p:nvSpPr>
         <p:spPr>
@@ -1069,7 +1070,7 @@
       </p:sp>
       <p:grpSp>
         <p:nvGrpSpPr>
-          <p:cNvPr id="10028" name="Logo"/>
+          <p:cNvPr id="100028" name="Logo"/>
           <p:cNvGrpSpPr/>
           <p:nvPr/>
         </p:nvGrpSpPr>
@@ -1083,7 +1084,7 @@
         </p:grpSpPr>
         <p:sp>
           <p:nvSpPr>
-            <p:cNvPr id="10025" name="TextBox 2"/>
+            <p:cNvPr id="100025" name="TextBox 2"/>
             <p:cNvSpPr/>
             <p:nvPr/>
           </p:nvSpPr>
@@ -1102,17 +1103,12 @@
           <p:txBody>
             <a:bodyPr xmlns:a="http://schemas.openxmlformats.org/drawingml/2006/main"/>
             <a:lstStyle xmlns:a="http://schemas.openxmlformats.org/drawingml/2006/main"/>
-            <a:p xmlns:a="http://schemas.openxmlformats.org/drawingml/2006/main">
-              <a:r>
-                <a:rPr lang="en-US"/>
-                <a:t/>
-              </a:r>
-            </a:p>
+            <a:p xmlns:a="http://schemas.openxmlformats.org/drawingml/2006/main"/>
           </p:txBody>
         </p:sp>
         <p:sp>
           <p:nvSpPr>
-            <p:cNvPr id="10026" name="TextBox 3"/>
+            <p:cNvPr id="100026" name="TextBox 3"/>
             <p:cNvSpPr/>
             <p:nvPr/>
           </p:nvSpPr>
@@ -1133,17 +1129,12 @@
           <p:txBody>
             <a:bodyPr xmlns:a="http://schemas.openxmlformats.org/drawingml/2006/main"/>
             <a:lstStyle xmlns:a="http://schemas.openxmlformats.org/drawingml/2006/main"/>
-            <a:p xmlns:a="http://schemas.openxmlformats.org/drawingml/2006/main">
-              <a:r>
-                <a:rPr lang="en-US"/>
-                <a:t/>
-              </a:r>
-            </a:p>
+            <a:p xmlns:a="http://schemas.openxmlformats.org/drawingml/2006/main"/>
           </p:txBody>
         </p:sp>
         <p:sp>
           <p:nvSpPr>
-            <p:cNvPr id="10027" name="TextBox 4"/>
+            <p:cNvPr id="100027" name="TextBox 4"/>
             <p:cNvSpPr/>
             <p:nvPr/>
           </p:nvSpPr>
@@ -1164,19 +1155,14 @@
           <p:txBody>
             <a:bodyPr xmlns:a="http://schemas.openxmlformats.org/drawingml/2006/main"/>
             <a:lstStyle xmlns:a="http://schemas.openxmlformats.org/drawingml/2006/main"/>
-            <a:p xmlns:a="http://schemas.openxmlformats.org/drawingml/2006/main">
-              <a:r>
-                <a:rPr lang="en-US"/>
-                <a:t/>
-              </a:r>
-            </a:p>
+            <a:p xmlns:a="http://schemas.openxmlformats.org/drawingml/2006/main"/>
           </p:txBody>
         </p:sp>
       </p:grpSp>
       <p:sp>
         <p:nvSpPr>
-          <p:cNvPr id="10029" name="TextBox 2"/>
-          <p:cNvSpPr/>
+          <p:cNvPr id="100029" name="TextBox 2"/>
+          <p:cNvSpPr txBox="1"/>
           <p:nvPr/>
         </p:nvSpPr>
         <p:spPr>
@@ -1194,14 +1180,14 @@
           <a:p xmlns:a="http://schemas.openxmlformats.org/drawingml/2006/main">
             <a:r>
               <a:rPr lang="en-US" sz="1200"/>
-              <a:t>Three ellipses grouped (shapes=/slide[3]/shape[@id=10025],/slide[3]/shape[@id=10026],/slide[3]/shape[@id=10027]).</a:t>
-            </a:r>
-          </a:p>
-        </p:txBody>
-      </p:sp>
-      <p:sp>
-        <p:nvSpPr>
-          <p:cNvPr id="10030" name="TextBox 3"/>
+              <a:t>Three ellipses grouped (shapes=/slide[3]/shape[@id=100025],/slide[3]/shape[@id=100026],/slide[3]/shape[@id=100027]).</a:t>
+            </a:r>
+          </a:p>
+        </p:txBody>
+      </p:sp>
+      <p:sp>
+        <p:nvSpPr>
+          <p:cNvPr id="100030" name="TextBox 3"/>
           <p:cNvSpPr/>
           <p:nvPr/>
         </p:nvSpPr>
@@ -1220,17 +1206,12 @@
         <p:txBody>
           <a:bodyPr xmlns:a="http://schemas.openxmlformats.org/drawingml/2006/main"/>
           <a:lstStyle xmlns:a="http://schemas.openxmlformats.org/drawingml/2006/main"/>
-          <a:p xmlns:a="http://schemas.openxmlformats.org/drawingml/2006/main">
-            <a:r>
-              <a:rPr lang="en-US"/>
-              <a:t/>
-            </a:r>
-          </a:p>
-        </p:txBody>
-      </p:sp>
-      <p:sp>
-        <p:nvSpPr>
-          <p:cNvPr id="10031" name="TextBox 4"/>
+          <a:p xmlns:a="http://schemas.openxmlformats.org/drawingml/2006/main"/>
+        </p:txBody>
+      </p:sp>
+      <p:sp>
+        <p:nvSpPr>
+          <p:cNvPr id="100031" name="TextBox 4"/>
           <p:cNvSpPr/>
           <p:nvPr/>
         </p:nvSpPr>
@@ -1249,17 +1230,12 @@
         <p:txBody>
           <a:bodyPr xmlns:a="http://schemas.openxmlformats.org/drawingml/2006/main"/>
           <a:lstStyle xmlns:a="http://schemas.openxmlformats.org/drawingml/2006/main"/>
-          <a:p xmlns:a="http://schemas.openxmlformats.org/drawingml/2006/main">
-            <a:r>
-              <a:rPr lang="en-US"/>
-              <a:t/>
-            </a:r>
-          </a:p>
-        </p:txBody>
-      </p:sp>
-      <p:sp>
-        <p:nvSpPr>
-          <p:cNvPr id="10032" name="TextBox 5"/>
+          <a:p xmlns:a="http://schemas.openxmlformats.org/drawingml/2006/main"/>
+        </p:txBody>
+      </p:sp>
+      <p:sp>
+        <p:nvSpPr>
+          <p:cNvPr id="100032" name="TextBox 5"/>
           <p:cNvSpPr/>
           <p:nvPr/>
         </p:nvSpPr>
@@ -1278,18 +1254,13 @@
         <p:txBody>
           <a:bodyPr xmlns:a="http://schemas.openxmlformats.org/drawingml/2006/main"/>
           <a:lstStyle xmlns:a="http://schemas.openxmlformats.org/drawingml/2006/main"/>
-          <a:p xmlns:a="http://schemas.openxmlformats.org/drawingml/2006/main">
-            <a:r>
-              <a:rPr lang="en-US"/>
-              <a:t/>
-            </a:r>
-          </a:p>
-        </p:txBody>
-      </p:sp>
-      <p:sp>
-        <p:nvSpPr>
-          <p:cNvPr id="10033" name="TextBox 6"/>
-          <p:cNvSpPr/>
+          <a:p xmlns:a="http://schemas.openxmlformats.org/drawingml/2006/main"/>
+        </p:txBody>
+      </p:sp>
+      <p:sp>
+        <p:nvSpPr>
+          <p:cNvPr id="100033" name="TextBox 6"/>
+          <p:cNvSpPr txBox="1"/>
           <p:nvPr/>
         </p:nvSpPr>
         <p:spPr>
@@ -1308,6 +1279,486 @@
             <a:r>
               <a:rPr lang="en-US" sz="1200"/>
               <a:t>Three independent boxes (no group — each addressed separately).</a:t>
+            </a:r>
+          </a:p>
+        </p:txBody>
+      </p:sp>
+    </p:spTree>
+  </p:cSld>
+</p:sld>
+</file>
+
+<file path=ppt/slides/slide4.xml><?xml version="1.0" encoding="utf-8"?>
+<p:sld xmlns:p="http://schemas.openxmlformats.org/presentationml/2006/main">
+  <p:cSld>
+    <p:spTree>
+      <p:nvGrpSpPr>
+        <p:cNvPr id="1" name=""/>
+        <p:cNvGrpSpPr/>
+        <p:nvPr/>
+      </p:nvGrpSpPr>
+      <p:grpSpPr/>
+      <p:sp>
+        <p:nvSpPr>
+          <p:cNvPr id="100034" name="TextBox 1"/>
+          <p:cNvSpPr txBox="1"/>
+          <p:nvPr/>
+        </p:nvSpPr>
+        <p:spPr>
+          <a:xfrm xmlns:a="http://schemas.openxmlformats.org/drawingml/2006/main">
+            <a:off x="457200" y="274320"/>
+            <a:ext cx="10972800" cy="548640"/>
+          </a:xfrm>
+          <a:prstGeom xmlns:a="http://schemas.openxmlformats.org/drawingml/2006/main" prst="rect">
+            <a:avLst/>
+          </a:prstGeom>
+        </p:spPr>
+        <p:txBody>
+          <a:bodyPr xmlns:a="http://schemas.openxmlformats.org/drawingml/2006/main"/>
+          <a:lstStyle xmlns:a="http://schemas.openxmlformats.org/drawingml/2006/main"/>
+          <a:p xmlns:a="http://schemas.openxmlformats.org/drawingml/2006/main">
+            <a:r>
+              <a:rPr lang="en-US" sz="2400" b="1"/>
+              <a:t>headEnd / lineJoin / miterLimit on Connectors</a:t>
+            </a:r>
+          </a:p>
+        </p:txBody>
+      </p:sp>
+      <p:sp>
+        <p:nvSpPr>
+          <p:cNvPr id="100035" name="TextBox 2"/>
+          <p:cNvSpPr txBox="1"/>
+          <p:nvPr/>
+        </p:nvSpPr>
+        <p:spPr>
+          <a:xfrm xmlns:a="http://schemas.openxmlformats.org/drawingml/2006/main">
+            <a:off x="457200" y="1005840"/>
+            <a:ext cx="10972800" cy="365760"/>
+          </a:xfrm>
+          <a:prstGeom xmlns:a="http://schemas.openxmlformats.org/drawingml/2006/main" prst="rect">
+            <a:avLst/>
+          </a:prstGeom>
+        </p:spPr>
+        <p:txBody>
+          <a:bodyPr xmlns:a="http://schemas.openxmlformats.org/drawingml/2006/main"/>
+          <a:lstStyle xmlns:a="http://schemas.openxmlformats.org/drawingml/2006/main"/>
+          <a:p xmlns:a="http://schemas.openxmlformats.org/drawingml/2006/main">
+            <a:r>
+              <a:rPr lang="en-US" sz="1400" b="1"/>
+              <a:t>headEnd + tailEnd arrowhead combinations:</a:t>
+            </a:r>
+          </a:p>
+        </p:txBody>
+      </p:sp>
+      <p:cxnSp>
+        <p:nvCxnSpPr>
+          <p:cNvPr id="100036" name="Connector 1"/>
+          <p:cNvCxnSpPr/>
+          <p:nvPr/>
+        </p:nvCxnSpPr>
+        <p:spPr>
+          <a:xfrm xmlns:a="http://schemas.openxmlformats.org/drawingml/2006/main">
+            <a:off x="457200" y="1645920"/>
+            <a:ext cx="4572000" cy="0"/>
+          </a:xfrm>
+          <a:prstGeom xmlns:a="http://schemas.openxmlformats.org/drawingml/2006/main" prst="straightConnector1">
+            <a:avLst/>
+          </a:prstGeom>
+          <a:ln xmlns:a="http://schemas.openxmlformats.org/drawingml/2006/main" w="25400">
+            <a:solidFill>
+              <a:srgbClr val="1D3557"/>
+            </a:solidFill>
+            <a:headEnd type="triangle"/>
+            <a:tailEnd type="oval"/>
+          </a:ln>
+        </p:spPr>
+      </p:cxnSp>
+      <p:sp>
+        <p:nvSpPr>
+          <p:cNvPr id="100037" name="TextBox 3"/>
+          <p:cNvSpPr txBox="1"/>
+          <p:nvPr/>
+        </p:nvSpPr>
+        <p:spPr>
+          <a:xfrm xmlns:a="http://schemas.openxmlformats.org/drawingml/2006/main">
+            <a:off x="5303520" y="1645920"/>
+            <a:ext cx="5486400" cy="365760"/>
+          </a:xfrm>
+          <a:prstGeom xmlns:a="http://schemas.openxmlformats.org/drawingml/2006/main" prst="rect">
+            <a:avLst/>
+          </a:prstGeom>
+        </p:spPr>
+        <p:txBody>
+          <a:bodyPr xmlns:a="http://schemas.openxmlformats.org/drawingml/2006/main"/>
+          <a:lstStyle xmlns:a="http://schemas.openxmlformats.org/drawingml/2006/main"/>
+          <a:p xmlns:a="http://schemas.openxmlformats.org/drawingml/2006/main">
+            <a:r>
+              <a:rPr lang="en-US" sz="1200"/>
+              <a:t>headEnd=triangle  tailEnd=oval</a:t>
+            </a:r>
+          </a:p>
+        </p:txBody>
+      </p:sp>
+      <p:cxnSp>
+        <p:nvCxnSpPr>
+          <p:cNvPr id="100038" name="Connector 2"/>
+          <p:cNvCxnSpPr/>
+          <p:nvPr/>
+        </p:nvCxnSpPr>
+        <p:spPr>
+          <a:xfrm xmlns:a="http://schemas.openxmlformats.org/drawingml/2006/main">
+            <a:off x="457200" y="2377440"/>
+            <a:ext cx="4572000" cy="0"/>
+          </a:xfrm>
+          <a:prstGeom xmlns:a="http://schemas.openxmlformats.org/drawingml/2006/main" prst="straightConnector1">
+            <a:avLst/>
+          </a:prstGeom>
+          <a:ln xmlns:a="http://schemas.openxmlformats.org/drawingml/2006/main" w="25400">
+            <a:solidFill>
+              <a:srgbClr val="1D3557"/>
+            </a:solidFill>
+            <a:headEnd type="diamond"/>
+            <a:tailEnd type="arrow"/>
+          </a:ln>
+        </p:spPr>
+      </p:cxnSp>
+      <p:sp>
+        <p:nvSpPr>
+          <p:cNvPr id="100039" name="TextBox 4"/>
+          <p:cNvSpPr txBox="1"/>
+          <p:nvPr/>
+        </p:nvSpPr>
+        <p:spPr>
+          <a:xfrm xmlns:a="http://schemas.openxmlformats.org/drawingml/2006/main">
+            <a:off x="5303520" y="2377440"/>
+            <a:ext cx="5486400" cy="365760"/>
+          </a:xfrm>
+          <a:prstGeom xmlns:a="http://schemas.openxmlformats.org/drawingml/2006/main" prst="rect">
+            <a:avLst/>
+          </a:prstGeom>
+        </p:spPr>
+        <p:txBody>
+          <a:bodyPr xmlns:a="http://schemas.openxmlformats.org/drawingml/2006/main"/>
+          <a:lstStyle xmlns:a="http://schemas.openxmlformats.org/drawingml/2006/main"/>
+          <a:p xmlns:a="http://schemas.openxmlformats.org/drawingml/2006/main">
+            <a:r>
+              <a:rPr lang="en-US" sz="1200"/>
+              <a:t>headEnd=diamond  tailEnd=arrow</a:t>
+            </a:r>
+          </a:p>
+        </p:txBody>
+      </p:sp>
+      <p:cxnSp>
+        <p:nvCxnSpPr>
+          <p:cNvPr id="100040" name="Connector 3"/>
+          <p:cNvCxnSpPr/>
+          <p:nvPr/>
+        </p:nvCxnSpPr>
+        <p:spPr>
+          <a:xfrm xmlns:a="http://schemas.openxmlformats.org/drawingml/2006/main">
+            <a:off x="457200" y="3108960"/>
+            <a:ext cx="4572000" cy="0"/>
+          </a:xfrm>
+          <a:prstGeom xmlns:a="http://schemas.openxmlformats.org/drawingml/2006/main" prst="straightConnector1">
+            <a:avLst/>
+          </a:prstGeom>
+          <a:ln xmlns:a="http://schemas.openxmlformats.org/drawingml/2006/main" w="25400">
+            <a:solidFill>
+              <a:srgbClr val="1D3557"/>
+            </a:solidFill>
+            <a:headEnd type="arrow"/>
+            <a:tailEnd type="arrow"/>
+          </a:ln>
+        </p:spPr>
+      </p:cxnSp>
+      <p:sp>
+        <p:nvSpPr>
+          <p:cNvPr id="100041" name="TextBox 5"/>
+          <p:cNvSpPr txBox="1"/>
+          <p:nvPr/>
+        </p:nvSpPr>
+        <p:spPr>
+          <a:xfrm xmlns:a="http://schemas.openxmlformats.org/drawingml/2006/main">
+            <a:off x="5303520" y="3108960"/>
+            <a:ext cx="5486400" cy="365760"/>
+          </a:xfrm>
+          <a:prstGeom xmlns:a="http://schemas.openxmlformats.org/drawingml/2006/main" prst="rect">
+            <a:avLst/>
+          </a:prstGeom>
+        </p:spPr>
+        <p:txBody>
+          <a:bodyPr xmlns:a="http://schemas.openxmlformats.org/drawingml/2006/main"/>
+          <a:lstStyle xmlns:a="http://schemas.openxmlformats.org/drawingml/2006/main"/>
+          <a:p xmlns:a="http://schemas.openxmlformats.org/drawingml/2006/main">
+            <a:r>
+              <a:rPr lang="en-US" sz="1200"/>
+              <a:t>headEnd=arrow  tailEnd=arrow</a:t>
+            </a:r>
+          </a:p>
+        </p:txBody>
+      </p:sp>
+      <p:sp>
+        <p:nvSpPr>
+          <p:cNvPr id="100042" name="TextBox 6"/>
+          <p:cNvSpPr txBox="1"/>
+          <p:nvPr/>
+        </p:nvSpPr>
+        <p:spPr>
+          <a:xfrm xmlns:a="http://schemas.openxmlformats.org/drawingml/2006/main">
+            <a:off x="457200" y="4206240"/>
+            <a:ext cx="10972800" cy="365760"/>
+          </a:xfrm>
+          <a:prstGeom xmlns:a="http://schemas.openxmlformats.org/drawingml/2006/main" prst="rect">
+            <a:avLst/>
+          </a:prstGeom>
+        </p:spPr>
+        <p:txBody>
+          <a:bodyPr xmlns:a="http://schemas.openxmlformats.org/drawingml/2006/main"/>
+          <a:lstStyle xmlns:a="http://schemas.openxmlformats.org/drawingml/2006/main"/>
+          <a:p xmlns:a="http://schemas.openxmlformats.org/drawingml/2006/main">
+            <a:r>
+              <a:rPr lang="en-US" sz="1400" b="1"/>
+              <a:t>lineJoin on elbow connectors:</a:t>
+            </a:r>
+          </a:p>
+        </p:txBody>
+      </p:sp>
+      <p:sp>
+        <p:nvSpPr>
+          <p:cNvPr id="100043" name="TextBox 7"/>
+          <p:cNvSpPr/>
+          <p:nvPr/>
+        </p:nvSpPr>
+        <p:spPr>
+          <a:xfrm xmlns:a="http://schemas.openxmlformats.org/drawingml/2006/main">
+            <a:off x="457200" y="4754880"/>
+            <a:ext cx="914400" cy="914400"/>
+          </a:xfrm>
+          <a:prstGeom xmlns:a="http://schemas.openxmlformats.org/drawingml/2006/main" prst="rect">
+            <a:avLst/>
+          </a:prstGeom>
+          <a:solidFill xmlns:a="http://schemas.openxmlformats.org/drawingml/2006/main">
+            <a:srgbClr val="4472C4"/>
+          </a:solidFill>
+        </p:spPr>
+        <p:txBody>
+          <a:bodyPr xmlns:a="http://schemas.openxmlformats.org/drawingml/2006/main"/>
+          <a:lstStyle xmlns:a="http://schemas.openxmlformats.org/drawingml/2006/main"/>
+          <a:p xmlns:a="http://schemas.openxmlformats.org/drawingml/2006/main"/>
+        </p:txBody>
+      </p:sp>
+      <p:sp>
+        <p:nvSpPr>
+          <p:cNvPr id="100044" name="TextBox 8"/>
+          <p:cNvSpPr/>
+          <p:nvPr/>
+        </p:nvSpPr>
+        <p:spPr>
+          <a:xfrm xmlns:a="http://schemas.openxmlformats.org/drawingml/2006/main">
+            <a:off x="3657600" y="6217920"/>
+            <a:ext cx="914400" cy="914400"/>
+          </a:xfrm>
+          <a:prstGeom xmlns:a="http://schemas.openxmlformats.org/drawingml/2006/main" prst="rect">
+            <a:avLst/>
+          </a:prstGeom>
+          <a:solidFill xmlns:a="http://schemas.openxmlformats.org/drawingml/2006/main">
+            <a:srgbClr val="4472C4"/>
+          </a:solidFill>
+        </p:spPr>
+        <p:txBody>
+          <a:bodyPr xmlns:a="http://schemas.openxmlformats.org/drawingml/2006/main"/>
+          <a:lstStyle xmlns:a="http://schemas.openxmlformats.org/drawingml/2006/main"/>
+          <a:p xmlns:a="http://schemas.openxmlformats.org/drawingml/2006/main"/>
+        </p:txBody>
+      </p:sp>
+      <p:cxnSp>
+        <p:nvCxnSpPr>
+          <p:cNvPr id="100045" name="Connector 4"/>
+          <p:cNvCxnSpPr/>
+          <p:nvPr/>
+        </p:nvCxnSpPr>
+        <p:spPr>
+          <a:xfrm xmlns:a="http://schemas.openxmlformats.org/drawingml/2006/main">
+            <a:off x="457200" y="4754880"/>
+            <a:ext cx="3657600" cy="1828800"/>
+          </a:xfrm>
+          <a:prstGeom xmlns:a="http://schemas.openxmlformats.org/drawingml/2006/main" prst="bentConnector3">
+            <a:avLst/>
+          </a:prstGeom>
+          <a:ln xmlns:a="http://schemas.openxmlformats.org/drawingml/2006/main" w="50800">
+            <a:solidFill>
+              <a:srgbClr val="E63946"/>
+            </a:solidFill>
+            <a:round/>
+          </a:ln>
+        </p:spPr>
+      </p:cxnSp>
+      <p:sp>
+        <p:nvSpPr>
+          <p:cNvPr id="100046" name="TextBox 9"/>
+          <p:cNvSpPr txBox="1"/>
+          <p:nvPr/>
+        </p:nvSpPr>
+        <p:spPr>
+          <a:xfrm xmlns:a="http://schemas.openxmlformats.org/drawingml/2006/main">
+            <a:off x="457200" y="6675120"/>
+            <a:ext cx="2743200" cy="365760"/>
+          </a:xfrm>
+          <a:prstGeom xmlns:a="http://schemas.openxmlformats.org/drawingml/2006/main" prst="rect">
+            <a:avLst/>
+          </a:prstGeom>
+        </p:spPr>
+        <p:txBody>
+          <a:bodyPr xmlns:a="http://schemas.openxmlformats.org/drawingml/2006/main"/>
+          <a:lstStyle xmlns:a="http://schemas.openxmlformats.org/drawingml/2006/main"/>
+          <a:p xmlns:a="http://schemas.openxmlformats.org/drawingml/2006/main">
+            <a:r>
+              <a:rPr lang="en-US" sz="1200"/>
+              <a:t>lineJoin=round</a:t>
+            </a:r>
+          </a:p>
+        </p:txBody>
+      </p:sp>
+      <p:cxnSp>
+        <p:nvCxnSpPr>
+          <p:cNvPr id="100047" name="Connector 5"/>
+          <p:cNvCxnSpPr/>
+          <p:nvPr/>
+        </p:nvCxnSpPr>
+        <p:spPr>
+          <a:xfrm xmlns:a="http://schemas.openxmlformats.org/drawingml/2006/main">
+            <a:off x="4572000" y="4754880"/>
+            <a:ext cx="3657600" cy="1828800"/>
+          </a:xfrm>
+          <a:prstGeom xmlns:a="http://schemas.openxmlformats.org/drawingml/2006/main" prst="bentConnector3">
+            <a:avLst/>
+          </a:prstGeom>
+          <a:ln xmlns:a="http://schemas.openxmlformats.org/drawingml/2006/main" w="50800">
+            <a:solidFill>
+              <a:srgbClr val="E63946"/>
+            </a:solidFill>
+            <a:bevel/>
+          </a:ln>
+        </p:spPr>
+      </p:cxnSp>
+      <p:sp>
+        <p:nvSpPr>
+          <p:cNvPr id="100048" name="TextBox 10"/>
+          <p:cNvSpPr txBox="1"/>
+          <p:nvPr/>
+        </p:nvSpPr>
+        <p:spPr>
+          <a:xfrm xmlns:a="http://schemas.openxmlformats.org/drawingml/2006/main">
+            <a:off x="4572000" y="6675120"/>
+            <a:ext cx="2743200" cy="365760"/>
+          </a:xfrm>
+          <a:prstGeom xmlns:a="http://schemas.openxmlformats.org/drawingml/2006/main" prst="rect">
+            <a:avLst/>
+          </a:prstGeom>
+        </p:spPr>
+        <p:txBody>
+          <a:bodyPr xmlns:a="http://schemas.openxmlformats.org/drawingml/2006/main"/>
+          <a:lstStyle xmlns:a="http://schemas.openxmlformats.org/drawingml/2006/main"/>
+          <a:p xmlns:a="http://schemas.openxmlformats.org/drawingml/2006/main">
+            <a:r>
+              <a:rPr lang="en-US" sz="1200"/>
+              <a:t>lineJoin=bevel</a:t>
+            </a:r>
+          </a:p>
+        </p:txBody>
+      </p:sp>
+      <p:cxnSp>
+        <p:nvCxnSpPr>
+          <p:cNvPr id="100049" name="Connector 6"/>
+          <p:cNvCxnSpPr/>
+          <p:nvPr/>
+        </p:nvCxnSpPr>
+        <p:spPr>
+          <a:xfrm xmlns:a="http://schemas.openxmlformats.org/drawingml/2006/main">
+            <a:off x="8686800" y="4754880"/>
+            <a:ext cx="3657600" cy="1828800"/>
+          </a:xfrm>
+          <a:prstGeom xmlns:a="http://schemas.openxmlformats.org/drawingml/2006/main" prst="bentConnector3">
+            <a:avLst/>
+          </a:prstGeom>
+          <a:ln xmlns:a="http://schemas.openxmlformats.org/drawingml/2006/main" w="50800">
+            <a:solidFill>
+              <a:srgbClr val="E63946"/>
+            </a:solidFill>
+            <a:miter/>
+          </a:ln>
+        </p:spPr>
+      </p:cxnSp>
+      <p:sp>
+        <p:nvSpPr>
+          <p:cNvPr id="100050" name="TextBox 11"/>
+          <p:cNvSpPr txBox="1"/>
+          <p:nvPr/>
+        </p:nvSpPr>
+        <p:spPr>
+          <a:xfrm xmlns:a="http://schemas.openxmlformats.org/drawingml/2006/main">
+            <a:off x="8686800" y="6675120"/>
+            <a:ext cx="2743200" cy="365760"/>
+          </a:xfrm>
+          <a:prstGeom xmlns:a="http://schemas.openxmlformats.org/drawingml/2006/main" prst="rect">
+            <a:avLst/>
+          </a:prstGeom>
+        </p:spPr>
+        <p:txBody>
+          <a:bodyPr xmlns:a="http://schemas.openxmlformats.org/drawingml/2006/main"/>
+          <a:lstStyle xmlns:a="http://schemas.openxmlformats.org/drawingml/2006/main"/>
+          <a:p xmlns:a="http://schemas.openxmlformats.org/drawingml/2006/main">
+            <a:r>
+              <a:rPr lang="en-US" sz="1200"/>
+              <a:t>lineJoin=miter</a:t>
+            </a:r>
+          </a:p>
+        </p:txBody>
+      </p:sp>
+      <p:cxnSp>
+        <p:nvCxnSpPr>
+          <p:cNvPr id="100051" name="Connector 7"/>
+          <p:cNvCxnSpPr/>
+          <p:nvPr/>
+        </p:nvCxnSpPr>
+        <p:spPr>
+          <a:xfrm xmlns:a="http://schemas.openxmlformats.org/drawingml/2006/main">
+            <a:off x="8686800" y="4754880"/>
+            <a:ext cx="2743200" cy="1828800"/>
+          </a:xfrm>
+          <a:prstGeom xmlns:a="http://schemas.openxmlformats.org/drawingml/2006/main" prst="bentConnector3">
+            <a:avLst/>
+          </a:prstGeom>
+          <a:ln xmlns:a="http://schemas.openxmlformats.org/drawingml/2006/main" w="76200">
+            <a:solidFill>
+              <a:srgbClr val="2A9D8F"/>
+            </a:solidFill>
+            <a:miter lim="800000"/>
+          </a:ln>
+        </p:spPr>
+      </p:cxnSp>
+      <p:sp>
+        <p:nvSpPr>
+          <p:cNvPr id="100052" name="TextBox 12"/>
+          <p:cNvSpPr txBox="1"/>
+          <p:nvPr/>
+        </p:nvSpPr>
+        <p:spPr>
+          <a:xfrm xmlns:a="http://schemas.openxmlformats.org/drawingml/2006/main">
+            <a:off x="8686800" y="6675120"/>
+            <a:ext cx="3657600" cy="365760"/>
+          </a:xfrm>
+          <a:prstGeom xmlns:a="http://schemas.openxmlformats.org/drawingml/2006/main" prst="rect">
+            <a:avLst/>
+          </a:prstGeom>
+        </p:spPr>
+        <p:txBody>
+          <a:bodyPr xmlns:a="http://schemas.openxmlformats.org/drawingml/2006/main"/>
+          <a:lstStyle xmlns:a="http://schemas.openxmlformats.org/drawingml/2006/main"/>
+          <a:p xmlns:a="http://schemas.openxmlformats.org/drawingml/2006/main">
+            <a:r>
+              <a:rPr lang="en-US" sz="1200"/>
+              <a:t>lineJoin="miter:800000"  (miter + 800% limit)</a:t>
             </a:r>
           </a:p>
         </p:txBody>

--- a/examples/ppt/shapes/shapes-connectors.pptx
+++ b/examples/ppt/shapes/shapes-connectors.pptx
@@ -5,10 +5,10 @@
     <p:sldMasterId xmlns:r="http://schemas.openxmlformats.org/officeDocument/2006/relationships" id="2147483648" r:id="rId1"/>
   </p:sldMasterIdLst>
   <p:sldIdLst>
-    <p:sldId id="256" r:id="R8d1328cca1684ee3"/>
-    <p:sldId id="257" r:id="R34e5d534818c4fae"/>
-    <p:sldId id="258" r:id="Rbe90c0d482dc4cbd"/>
-    <p:sldId id="259" r:id="Rb197c6c3088d411f"/>
+    <p:sldId id="256" r:id="R4dfd662735414d1b"/>
+    <p:sldId id="257" r:id="Rc5b561fea1d14f4c"/>
+    <p:sldId id="258" r:id="Re031ea04426746ce"/>
+    <p:sldId id="259" r:id="Rfb6ea1a8b57248be"/>
   </p:sldIdLst>
   <p:sldSz cx="12192000" cy="6858000"/>
   <p:notesSz cx="6858000" cy="9144000"/>
@@ -1523,69 +1523,21 @@
           </a:p>
         </p:txBody>
       </p:sp>
-      <p:sp>
-        <p:nvSpPr>
-          <p:cNvPr id="100043" name="TextBox 7"/>
-          <p:cNvSpPr/>
-          <p:nvPr/>
-        </p:nvSpPr>
-        <p:spPr>
-          <a:xfrm xmlns:a="http://schemas.openxmlformats.org/drawingml/2006/main">
-            <a:off x="457200" y="4754880"/>
-            <a:ext cx="914400" cy="914400"/>
-          </a:xfrm>
-          <a:prstGeom xmlns:a="http://schemas.openxmlformats.org/drawingml/2006/main" prst="rect">
-            <a:avLst/>
-          </a:prstGeom>
-          <a:solidFill xmlns:a="http://schemas.openxmlformats.org/drawingml/2006/main">
-            <a:srgbClr val="4472C4"/>
-          </a:solidFill>
-        </p:spPr>
-        <p:txBody>
-          <a:bodyPr xmlns:a="http://schemas.openxmlformats.org/drawingml/2006/main"/>
-          <a:lstStyle xmlns:a="http://schemas.openxmlformats.org/drawingml/2006/main"/>
-          <a:p xmlns:a="http://schemas.openxmlformats.org/drawingml/2006/main"/>
-        </p:txBody>
-      </p:sp>
-      <p:sp>
-        <p:nvSpPr>
-          <p:cNvPr id="100044" name="TextBox 8"/>
-          <p:cNvSpPr/>
-          <p:nvPr/>
-        </p:nvSpPr>
-        <p:spPr>
-          <a:xfrm xmlns:a="http://schemas.openxmlformats.org/drawingml/2006/main">
-            <a:off x="3657600" y="6217920"/>
-            <a:ext cx="914400" cy="914400"/>
-          </a:xfrm>
-          <a:prstGeom xmlns:a="http://schemas.openxmlformats.org/drawingml/2006/main" prst="rect">
-            <a:avLst/>
-          </a:prstGeom>
-          <a:solidFill xmlns:a="http://schemas.openxmlformats.org/drawingml/2006/main">
-            <a:srgbClr val="4472C4"/>
-          </a:solidFill>
-        </p:spPr>
-        <p:txBody>
-          <a:bodyPr xmlns:a="http://schemas.openxmlformats.org/drawingml/2006/main"/>
-          <a:lstStyle xmlns:a="http://schemas.openxmlformats.org/drawingml/2006/main"/>
-          <a:p xmlns:a="http://schemas.openxmlformats.org/drawingml/2006/main"/>
-        </p:txBody>
-      </p:sp>
       <p:cxnSp>
         <p:nvCxnSpPr>
-          <p:cNvPr id="100045" name="Connector 4"/>
+          <p:cNvPr id="100043" name="Connector 4"/>
           <p:cNvCxnSpPr/>
           <p:nvPr/>
         </p:nvCxnSpPr>
         <p:spPr>
           <a:xfrm xmlns:a="http://schemas.openxmlformats.org/drawingml/2006/main">
             <a:off x="457200" y="4754880"/>
-            <a:ext cx="3657600" cy="1828800"/>
+            <a:ext cx="3108960" cy="1463040"/>
           </a:xfrm>
           <a:prstGeom xmlns:a="http://schemas.openxmlformats.org/drawingml/2006/main" prst="bentConnector3">
             <a:avLst/>
           </a:prstGeom>
-          <a:ln xmlns:a="http://schemas.openxmlformats.org/drawingml/2006/main" w="50800">
+          <a:ln xmlns:a="http://schemas.openxmlformats.org/drawingml/2006/main" w="63500">
             <a:solidFill>
               <a:srgbClr val="E63946"/>
             </a:solidFill>
@@ -1595,14 +1547,14 @@
       </p:cxnSp>
       <p:sp>
         <p:nvSpPr>
-          <p:cNvPr id="100046" name="TextBox 9"/>
-          <p:cNvSpPr txBox="1"/>
-          <p:nvPr/>
-        </p:nvSpPr>
-        <p:spPr>
-          <a:xfrm xmlns:a="http://schemas.openxmlformats.org/drawingml/2006/main">
-            <a:off x="457200" y="6675120"/>
-            <a:ext cx="2743200" cy="365760"/>
+          <p:cNvPr id="100044" name="TextBox 7"/>
+          <p:cNvSpPr txBox="1"/>
+          <p:nvPr/>
+        </p:nvSpPr>
+        <p:spPr>
+          <a:xfrm xmlns:a="http://schemas.openxmlformats.org/drawingml/2006/main">
+            <a:off x="457200" y="6400800"/>
+            <a:ext cx="3657600" cy="365760"/>
           </a:xfrm>
           <a:prstGeom xmlns:a="http://schemas.openxmlformats.org/drawingml/2006/main" prst="rect">
             <a:avLst/>
@@ -1621,19 +1573,19 @@
       </p:sp>
       <p:cxnSp>
         <p:nvCxnSpPr>
-          <p:cNvPr id="100047" name="Connector 5"/>
+          <p:cNvPr id="100045" name="Connector 5"/>
           <p:cNvCxnSpPr/>
           <p:nvPr/>
         </p:nvCxnSpPr>
         <p:spPr>
           <a:xfrm xmlns:a="http://schemas.openxmlformats.org/drawingml/2006/main">
-            <a:off x="4572000" y="4754880"/>
-            <a:ext cx="3657600" cy="1828800"/>
+            <a:off x="4297680" y="4754880"/>
+            <a:ext cx="3108960" cy="1463040"/>
           </a:xfrm>
           <a:prstGeom xmlns:a="http://schemas.openxmlformats.org/drawingml/2006/main" prst="bentConnector3">
             <a:avLst/>
           </a:prstGeom>
-          <a:ln xmlns:a="http://schemas.openxmlformats.org/drawingml/2006/main" w="50800">
+          <a:ln xmlns:a="http://schemas.openxmlformats.org/drawingml/2006/main" w="63500">
             <a:solidFill>
               <a:srgbClr val="E63946"/>
             </a:solidFill>
@@ -1643,14 +1595,14 @@
       </p:cxnSp>
       <p:sp>
         <p:nvSpPr>
-          <p:cNvPr id="100048" name="TextBox 10"/>
-          <p:cNvSpPr txBox="1"/>
-          <p:nvPr/>
-        </p:nvSpPr>
-        <p:spPr>
-          <a:xfrm xmlns:a="http://schemas.openxmlformats.org/drawingml/2006/main">
-            <a:off x="4572000" y="6675120"/>
-            <a:ext cx="2743200" cy="365760"/>
+          <p:cNvPr id="100046" name="TextBox 8"/>
+          <p:cNvSpPr txBox="1"/>
+          <p:nvPr/>
+        </p:nvSpPr>
+        <p:spPr>
+          <a:xfrm xmlns:a="http://schemas.openxmlformats.org/drawingml/2006/main">
+            <a:off x="4297680" y="6400800"/>
+            <a:ext cx="3657600" cy="365760"/>
           </a:xfrm>
           <a:prstGeom xmlns:a="http://schemas.openxmlformats.org/drawingml/2006/main" prst="rect">
             <a:avLst/>
@@ -1669,67 +1621,19 @@
       </p:sp>
       <p:cxnSp>
         <p:nvCxnSpPr>
-          <p:cNvPr id="100049" name="Connector 6"/>
+          <p:cNvPr id="100047" name="Connector 6"/>
           <p:cNvCxnSpPr/>
           <p:nvPr/>
         </p:nvCxnSpPr>
         <p:spPr>
           <a:xfrm xmlns:a="http://schemas.openxmlformats.org/drawingml/2006/main">
-            <a:off x="8686800" y="4754880"/>
-            <a:ext cx="3657600" cy="1828800"/>
+            <a:off x="8138160" y="4754880"/>
+            <a:ext cx="3108960" cy="1463040"/>
           </a:xfrm>
           <a:prstGeom xmlns:a="http://schemas.openxmlformats.org/drawingml/2006/main" prst="bentConnector3">
             <a:avLst/>
           </a:prstGeom>
-          <a:ln xmlns:a="http://schemas.openxmlformats.org/drawingml/2006/main" w="50800">
-            <a:solidFill>
-              <a:srgbClr val="E63946"/>
-            </a:solidFill>
-            <a:miter/>
-          </a:ln>
-        </p:spPr>
-      </p:cxnSp>
-      <p:sp>
-        <p:nvSpPr>
-          <p:cNvPr id="100050" name="TextBox 11"/>
-          <p:cNvSpPr txBox="1"/>
-          <p:nvPr/>
-        </p:nvSpPr>
-        <p:spPr>
-          <a:xfrm xmlns:a="http://schemas.openxmlformats.org/drawingml/2006/main">
-            <a:off x="8686800" y="6675120"/>
-            <a:ext cx="2743200" cy="365760"/>
-          </a:xfrm>
-          <a:prstGeom xmlns:a="http://schemas.openxmlformats.org/drawingml/2006/main" prst="rect">
-            <a:avLst/>
-          </a:prstGeom>
-        </p:spPr>
-        <p:txBody>
-          <a:bodyPr xmlns:a="http://schemas.openxmlformats.org/drawingml/2006/main"/>
-          <a:lstStyle xmlns:a="http://schemas.openxmlformats.org/drawingml/2006/main"/>
-          <a:p xmlns:a="http://schemas.openxmlformats.org/drawingml/2006/main">
-            <a:r>
-              <a:rPr lang="en-US" sz="1200"/>
-              <a:t>lineJoin=miter</a:t>
-            </a:r>
-          </a:p>
-        </p:txBody>
-      </p:sp>
-      <p:cxnSp>
-        <p:nvCxnSpPr>
-          <p:cNvPr id="100051" name="Connector 7"/>
-          <p:cNvCxnSpPr/>
-          <p:nvPr/>
-        </p:nvCxnSpPr>
-        <p:spPr>
-          <a:xfrm xmlns:a="http://schemas.openxmlformats.org/drawingml/2006/main">
-            <a:off x="8686800" y="4754880"/>
-            <a:ext cx="2743200" cy="1828800"/>
-          </a:xfrm>
-          <a:prstGeom xmlns:a="http://schemas.openxmlformats.org/drawingml/2006/main" prst="bentConnector3">
-            <a:avLst/>
-          </a:prstGeom>
-          <a:ln xmlns:a="http://schemas.openxmlformats.org/drawingml/2006/main" w="76200">
+          <a:ln xmlns:a="http://schemas.openxmlformats.org/drawingml/2006/main" w="63500">
             <a:solidFill>
               <a:srgbClr val="2A9D8F"/>
             </a:solidFill>
@@ -1739,13 +1643,13 @@
       </p:cxnSp>
       <p:sp>
         <p:nvSpPr>
-          <p:cNvPr id="100052" name="TextBox 12"/>
-          <p:cNvSpPr txBox="1"/>
-          <p:nvPr/>
-        </p:nvSpPr>
-        <p:spPr>
-          <a:xfrm xmlns:a="http://schemas.openxmlformats.org/drawingml/2006/main">
-            <a:off x="8686800" y="6675120"/>
+          <p:cNvPr id="100048" name="TextBox 9"/>
+          <p:cNvSpPr txBox="1"/>
+          <p:nvPr/>
+        </p:nvSpPr>
+        <p:spPr>
+          <a:xfrm xmlns:a="http://schemas.openxmlformats.org/drawingml/2006/main">
+            <a:off x="8138160" y="6400800"/>
             <a:ext cx="3657600" cy="365760"/>
           </a:xfrm>
           <a:prstGeom xmlns:a="http://schemas.openxmlformats.org/drawingml/2006/main" prst="rect">
@@ -1758,7 +1662,7 @@
           <a:p xmlns:a="http://schemas.openxmlformats.org/drawingml/2006/main">
             <a:r>
               <a:rPr lang="en-US" sz="1200"/>
-              <a:t>lineJoin="miter:800000"  (miter + 800% limit)</a:t>
+              <a:t>lineJoin=miter:800000 (800% limit)</a:t>
             </a:r>
           </a:p>
         </p:txBody>
